--- a/emitterbeskrivning.pptx
+++ b/emitterbeskrivning.pptx
@@ -1128,7 +1128,7 @@
           <a:p>
             <a:r>
               <a:rPr lang="en-US" dirty="0"/>
-              <a:t>Nyckeln är att facit är gratis och alltid rätt, eftersom vi själva har bestämt emittern. Det är därför vi kan träna utan annoterad insamlad data. Bortfallet i steg två är viktigt — tränar man bara på perfekta följder lär sig modellen aldrig hantera det som faktiskt är svårt.</a:t>
+              <a:t>Håll det på den här nivån. Punkt ett och två hör ihop: facit matas in förskjutet så att modellen alltid vet vad som stod före, och spärren gör att den inte kan fuska genom att titta på svaret — det är vad som gör att hela sekvensen kan beräknas i ett svep i stället för tecken för tecken. Punkt tre är varför en PRI som ligger en bin fel straffas mildare än en som ligger helt fel. Punkt fyra är den viktiga: siffrorna vi rapporterar kommer från att modellen skriver hela posten på egen hand, utan stöd. Datan och generatorn täcks av [kollegan].</a:t>
             </a:r>
             <a:endParaRPr lang="en-US" dirty="0"/>
           </a:p>
@@ -2143,7 +2143,7 @@
                 <a:ea typeface="Calibri" pitchFamily="34" charset="-122"/>
                 <a:cs typeface="Calibri" pitchFamily="34" charset="-120"/>
               </a:rPr>
-              <a:t>Generator som följer den riktiga datans parametrar</a:t>
+              <a:t>Encoder–avkodare som genomgående ger giltiga poster</a:t>
             </a:r>
             <a:endParaRPr lang="en-US" sz="1350" dirty="0"/>
           </a:p>
@@ -4077,7 +4077,7 @@
                 <a:ea typeface="Cambria" pitchFamily="34" charset="-122"/>
                 <a:cs typeface="Cambria" pitchFamily="34" charset="-120"/>
               </a:rPr>
-              <a:t>Träningen bygger på en generator, inte på insamlad data</a:t>
+              <a:t>Så lär sig modellen</a:t>
             </a:r>
             <a:endParaRPr lang="en-US" sz="3400" dirty="0"/>
           </a:p>
@@ -4116,7 +4116,7 @@
                 <a:ea typeface="Calibri" pitchFamily="34" charset="-122"/>
                 <a:cs typeface="Calibri" pitchFamily="34" charset="-120"/>
               </a:rPr>
-              <a:t>Vi kan skapa obegränsat med exempel där vi vet det korrekta svaret</a:t>
+              <a:t>Den tränas på att förutsäga nästa tecken i beskrivningen, ett facit i taget</a:t>
             </a:r>
             <a:endParaRPr lang="en-US" sz="1500" dirty="0"/>
           </a:p>
@@ -4222,7 +4222,7 @@
         <p:spPr>
           <a:xfrm>
             <a:off x="1527048" y="2002536"/>
-            <a:ext cx="3017520" cy="704088"/>
+            <a:ext cx="3566160" cy="704088"/>
           </a:xfrm>
           <a:prstGeom prst="rect">
             <a:avLst/>
@@ -4246,7 +4246,7 @@
                 <a:ea typeface="Calibri" pitchFamily="34" charset="-122"/>
                 <a:cs typeface="Calibri" pitchFamily="34" charset="-120"/>
               </a:rPr>
-              <a:t>Dra en emitter</a:t>
+              <a:t>Den ser hela pulsföljden</a:t>
             </a:r>
             <a:endParaRPr lang="en-US" sz="1600" dirty="0"/>
           </a:p>
@@ -4260,8 +4260,8 @@
         </p:nvSpPr>
         <p:spPr>
           <a:xfrm>
-            <a:off x="4590288" y="2002536"/>
-            <a:ext cx="6574536" cy="704088"/>
+            <a:off x="5138928" y="2002536"/>
+            <a:ext cx="6025896" cy="704088"/>
           </a:xfrm>
           <a:prstGeom prst="rect">
             <a:avLst/>
@@ -4285,7 +4285,7 @@
                 <a:ea typeface="Calibri" pitchFamily="34" charset="-122"/>
                 <a:cs typeface="Calibri" pitchFamily="34" charset="-120"/>
               </a:rPr>
-              <a:t>Parametrarna dras ur samma intervall som den riktiga generatorn använder</a:t>
+              <a:t>och får facit förskjutet ett steg som ledtråd — den ska gissa nästa tecken givet de föregående</a:t>
             </a:r>
             <a:endParaRPr lang="en-US" sz="1400" dirty="0"/>
           </a:p>
@@ -4391,7 +4391,7 @@
         <p:spPr>
           <a:xfrm>
             <a:off x="1527048" y="3063240"/>
-            <a:ext cx="3017520" cy="704088"/>
+            <a:ext cx="3566160" cy="704088"/>
           </a:xfrm>
           <a:prstGeom prst="rect">
             <a:avLst/>
@@ -4415,7 +4415,7 @@
                 <a:ea typeface="Calibri" pitchFamily="34" charset="-122"/>
                 <a:cs typeface="Calibri" pitchFamily="34" charset="-120"/>
               </a:rPr>
-              <a:t>Rulla ut signalen</a:t>
+              <a:t>Den får inte tjuvkika</a:t>
             </a:r>
             <a:endParaRPr lang="en-US" sz="1600" dirty="0"/>
           </a:p>
@@ -4429,8 +4429,8 @@
         </p:nvSpPr>
         <p:spPr>
           <a:xfrm>
-            <a:off x="4590288" y="3063240"/>
-            <a:ext cx="6574536" cy="704088"/>
+            <a:off x="5138928" y="3063240"/>
+            <a:ext cx="6025896" cy="704088"/>
           </a:xfrm>
           <a:prstGeom prst="rect">
             <a:avLst/>
@@ -4454,7 +4454,7 @@
                 <a:ea typeface="Calibri" pitchFamily="34" charset="-122"/>
                 <a:cs typeface="Calibri" pitchFamily="34" charset="-120"/>
               </a:rPr>
-              <a:t>Mönstret upprepas till 512 pulser, och en slumpmässig andel pulser tappas</a:t>
+              <a:t>en spärr hindrar varje position från att se framåt i facit, så alla positioner kan räknas samtidigt</a:t>
             </a:r>
             <a:endParaRPr lang="en-US" sz="1400" dirty="0"/>
           </a:p>
@@ -4560,7 +4560,7 @@
         <p:spPr>
           <a:xfrm>
             <a:off x="1527048" y="4123944"/>
-            <a:ext cx="3017520" cy="704088"/>
+            <a:ext cx="3566160" cy="704088"/>
           </a:xfrm>
           <a:prstGeom prst="rect">
             <a:avLst/>
@@ -4584,7 +4584,7 @@
                 <a:ea typeface="Calibri" pitchFamily="34" charset="-122"/>
                 <a:cs typeface="Calibri" pitchFamily="34" charset="-120"/>
               </a:rPr>
-              <a:t>Bygg facit</a:t>
+              <a:t>Felet mäts tecken för tecken</a:t>
             </a:r>
             <a:endParaRPr lang="en-US" sz="1600" dirty="0"/>
           </a:p>
@@ -4598,8 +4598,8 @@
         </p:nvSpPr>
         <p:spPr>
           <a:xfrm>
-            <a:off x="4590288" y="4123944"/>
-            <a:ext cx="6574536" cy="704088"/>
+            <a:off x="5138928" y="4123944"/>
+            <a:ext cx="6025896" cy="704088"/>
           </a:xfrm>
           <a:prstGeom prst="rect">
             <a:avLst/>
@@ -4623,7 +4623,7 @@
                 <a:ea typeface="Calibri" pitchFamily="34" charset="-122"/>
                 <a:cs typeface="Calibri" pitchFamily="34" charset="-120"/>
               </a:rPr>
-              <a:t>Beskrivningen skrivs direkt ur emitterns parametrar — den är alltid korrekt</a:t>
+              <a:t>ett PRI-värde nära det rätta räknas som nästan rätt, inte som lika fel som ett helt annat värde</a:t>
             </a:r>
             <a:endParaRPr lang="en-US" sz="1400" dirty="0"/>
           </a:p>
@@ -4729,7 +4729,7 @@
         <p:spPr>
           <a:xfrm>
             <a:off x="1527048" y="5184648"/>
-            <a:ext cx="3017520" cy="704088"/>
+            <a:ext cx="3566160" cy="704088"/>
           </a:xfrm>
           <a:prstGeom prst="rect">
             <a:avLst/>
@@ -4753,7 +4753,7 @@
                 <a:ea typeface="Calibri" pitchFamily="34" charset="-122"/>
                 <a:cs typeface="Calibri" pitchFamily="34" charset="-120"/>
               </a:rPr>
-              <a:t>Jämför och justera</a:t>
+              <a:t>Vid mätning får den inget facit</a:t>
             </a:r>
             <a:endParaRPr lang="en-US" sz="1600" dirty="0"/>
           </a:p>
@@ -4767,8 +4767,8 @@
         </p:nvSpPr>
         <p:spPr>
           <a:xfrm>
-            <a:off x="4590288" y="5184648"/>
-            <a:ext cx="6574536" cy="704088"/>
+            <a:off x="5138928" y="5184648"/>
+            <a:ext cx="6025896" cy="704088"/>
           </a:xfrm>
           <a:prstGeom prst="rect">
             <a:avLst/>
@@ -4792,7 +4792,7 @@
                 <a:ea typeface="Calibri" pitchFamily="34" charset="-122"/>
                 <a:cs typeface="Calibri" pitchFamily="34" charset="-120"/>
               </a:rPr>
-              <a:t>Modellen gissar, felet mäts tecken för tecken, vikterna flyttas en aning</a:t>
+              <a:t>då skriver den hela beskrivningen själv, och det är den siffran som räknas</a:t>
             </a:r>
             <a:endParaRPr lang="en-US" sz="1400" dirty="0"/>
           </a:p>
@@ -4831,7 +4831,7 @@
                 <a:ea typeface="Calibri" pitchFamily="34" charset="-122"/>
                 <a:cs typeface="Calibri" pitchFamily="34" charset="-120"/>
               </a:rPr>
-              <a:t>Cirka en miljon exempel per körning. Ingen emitter visas två gånger.</a:t>
+              <a:t>Rad 1 mot rad 4 är själva poängen: under träningen får den alltid ett korrekt facit att bygga vidare på, vid mätning bara sitt eget.</a:t>
             </a:r>
             <a:endParaRPr lang="en-US" sz="1200" dirty="0"/>
           </a:p>
